--- a/demo_session/deck_dwd_march.pptx
+++ b/demo_session/deck_dwd_march.pptx
@@ -5567,6 +5567,45 @@
                 </a:solidFill>
                 <a:latin typeface="Arial"/>
               </a:rPr>
+              <a:t>THE E4 ROW IS ROUND-OFF, NOT SIGNAL.  Element 4 is the virtual centre segment; its six columns are dead -- Rx, Rz, Tz are EXACTLY zero (0 non-zero of 54 595 rows, so nothing is drawn) and Ry, Tx, Ty carry max 1.1e-14 / 8.5e-16 mm on 612 / 8 641 / 2 491 rows, taking 3-4 distinct values each: the finite-difference floor of a re-trace, 17 decades below element 5 (max 1.4e+03, rms 1.6e+02).  The thumbnails are autoscaled with no colorbar, so those few pixels are painted across the full jet range.  flag_zero_norm_channels catches the column and the driver drops it from the saved .mat; the figures are drawn before that drop.</a:t>
+            </a:r>
+          </a:p>
+        </p:txBody>
+      </p:sp>
+      <p:sp>
+        <p:nvSpPr>
+          <p:cNvPr id="8" name="TextBox 7"/>
+          <p:cNvSpPr txBox="1"/>
+          <p:nvPr/>
+        </p:nvSpPr>
+        <p:spPr>
+          <a:xfrm>
+            <a:off x="6400800" y="4322826"/>
+            <a:ext cx="5394960" cy="274320"/>
+          </a:xfrm>
+          <a:prstGeom prst="rect">
+            <a:avLst/>
+          </a:prstGeom>
+          <a:noFill/>
+        </p:spPr>
+        <p:txBody>
+          <a:bodyPr wrap="square">
+            <a:spAutoFit/>
+          </a:bodyPr>
+          <a:lstStyle/>
+          <a:p>
+            <a:pPr>
+              <a:spcAft>
+                <a:spcPts val="600"/>
+              </a:spcAft>
+            </a:pPr>
+            <a:r>
+              <a:rPr sz="1050" b="0">
+                <a:solidFill>
+                  <a:srgbClr val="6E6E6E"/>
+                </a:solidFill>
+                <a:latin typeface="Arial"/>
+              </a:rPr>
               <a:t>Panels are drawn at a floor of 3.5 in per OPD map / 1.2 in per field tile and the pages follow, so a 19-segment harvest is 275 readable pages (17 MB) instead of one sheet of specks.  &lt;name&gt;_&lt;ch&gt;_channels.png is that contact sheet; &lt;name&gt;_pages_index.txt lists every page with its element and channels; the full-size pages are in &lt;name&gt;_pages/ (gitignored -- regenerate with the four run_dwd*_5zoom_5fov.m drivers).</a:t>
             </a:r>
           </a:p>

--- a/demo_session/deck_dwd_march.pptx
+++ b/demo_session/deck_dwd_march.pptx
@@ -4786,8 +4786,8 @@
         </p:blipFill>
         <p:spPr>
           <a:xfrm>
-            <a:off x="2741858" y="1298448"/>
-            <a:ext cx="1145683" cy="3994912"/>
+            <a:off x="2793942" y="1298448"/>
+            <a:ext cx="1041514" cy="4213352"/>
           </a:xfrm>
           <a:prstGeom prst="rect">
             <a:avLst/>
@@ -4802,8 +4802,8 @@
         </p:nvSpPr>
         <p:spPr>
           <a:xfrm>
-            <a:off x="411480" y="5311647"/>
-            <a:ext cx="5806440" cy="394208"/>
+            <a:off x="411480" y="5530088"/>
+            <a:ext cx="5806440" cy="724408"/>
           </a:xfrm>
           <a:prstGeom prst="rect">
             <a:avLst/>
@@ -4828,7 +4828,7 @@
                 </a:solidFill>
                 <a:latin typeface="Arial"/>
               </a:rPr>
-              <a:t>The dW/dx contact sheet: every one of the 138 channels as a thumbnail, each labelled with the full-size page it is drawn on (E5 Rx p04 ...).</a:t>
+              <a:t>The dW/dx contact sheet: 23 rows (one per element, group, source) x 6 DOFs. Each row is named once on the left, each thumbnail carries its channel and page ("Rx  pg 4") and its own rms underneath -- so a dead channel announces itself instead of being painted at full colour scale.</a:t>
             </a:r>
           </a:p>
         </p:txBody>
@@ -5567,7 +5567,7 @@
                 </a:solidFill>
                 <a:latin typeface="Arial"/>
               </a:rPr>
-              <a:t>THE E4 ROW IS ROUND-OFF, NOT SIGNAL.  Element 4 is the virtual centre segment; its six columns are dead -- Rx, Rz, Tz are EXACTLY zero (0 non-zero of 54 595 rows, so nothing is drawn) and Ry, Tx, Ty carry max 1.1e-14 / 8.5e-16 mm on 612 / 8 641 / 2 491 rows, taking 3-4 distinct values each: the finite-difference floor of a re-trace, 17 decades below element 5 (max 1.4e+03, rms 1.6e+02).  The thumbnails are autoscaled with no colorbar, so those few pixels are painted across the full jet range.  flag_zero_norm_channels catches the column and the driver drops it from the saved .mat; the figures are drawn before that drop.</a:t>
+              <a:t>THE E4 ROW IS ROUND-OFF, AND THE SHEET NOW SAYS SO.  Element 4 is the virtual centre segment; its six columns are dead -- Rx, Rz, Tz are EXACTLY zero over all 54 595 rows (nothing drawn, rms 0) and Ry, Tx, Ty carry max 1.06e-14 / 8.47e-16 / 8.47e-16 mm on 612 / 8 641 / 2 491 rows, taking 3-4 distinct values each: the finite-difference floor of a re-trace, 17 decades below element 5 (column max 1.405e+03, rms 1.614e+02).  Autoscaled thumbnails with no colorbar painted those few pixels across the full jet range, which reads as structure; the per-panel rms is the scale the colours were missing (rms 4.3e-15 against rms 1.6e+02 one row down).  Panel rms is of the map AS DRAWN -- valid pixels, piston removed -- so it differs from the column rms over all rows.  flag_zero_norm_channels catches the column and the driver drops it from the saved .mat; the figures are drawn before that drop.</a:t>
             </a:r>
           </a:p>
         </p:txBody>
@@ -5580,7 +5580,7 @@
         </p:nvSpPr>
         <p:spPr>
           <a:xfrm>
-            <a:off x="6400800" y="4322826"/>
+            <a:off x="6400800" y="5016246"/>
             <a:ext cx="5394960" cy="274320"/>
           </a:xfrm>
           <a:prstGeom prst="rect">
